--- a/docs/presentation/ChargeHub-Presentation.pptx
+++ b/docs/presentation/ChargeHub-Presentation.pptx
@@ -618,7 +618,7 @@
           <a:p>
             <a:r>
               <a:rPr lang="en-US" dirty="0"/>
-              <a:t>Abdel Aziz. Ninety seconds — this is a required section.</a:t>
+              <a:t>Aya. Ninety seconds — this is a required section.</a:t>
             </a:r>
             <a:endParaRPr lang="en-US" dirty="0"/>
           </a:p>
@@ -882,7 +882,7 @@
           <a:p>
             <a:r>
               <a:rPr lang="en-US" dirty="0"/>
-              <a:t>Aya takes over.</a:t>
+              <a:t>Abdel Aziz — you cover what was built; Aya returns for the demo.</a:t>
             </a:r>
             <a:endParaRPr lang="en-US" dirty="0"/>
           </a:p>
@@ -4821,7 +4821,7 @@
                 <a:ea typeface="Calibri" pitchFamily="34" charset="-122"/>
                 <a:cs typeface="Calibri" pitchFamily="34" charset="-120"/>
               </a:rPr>
-              <a:t>Abdel Aziz</a:t>
+              <a:t>Aya</a:t>
             </a:r>
             <a:endParaRPr lang="en-US" sz="1000" dirty="0"/>
           </a:p>
@@ -5877,7 +5877,7 @@
                 <a:ea typeface="Calibri" pitchFamily="34" charset="-122"/>
                 <a:cs typeface="Calibri" pitchFamily="34" charset="-120"/>
               </a:rPr>
-              <a:t>Abdel Aziz</a:t>
+              <a:t>Aya</a:t>
             </a:r>
             <a:endParaRPr lang="en-US" sz="1000" dirty="0"/>
           </a:p>
@@ -7625,7 +7625,7 @@
                 <a:ea typeface="Calibri" pitchFamily="34" charset="-122"/>
                 <a:cs typeface="Calibri" pitchFamily="34" charset="-120"/>
               </a:rPr>
-              <a:t>Aya</a:t>
+              <a:t>Abdel Aziz</a:t>
             </a:r>
             <a:endParaRPr lang="en-US" sz="1000" dirty="0"/>
           </a:p>
@@ -12143,7 +12143,7 @@
                 <a:ea typeface="Calibri" pitchFamily="34" charset="-122"/>
                 <a:cs typeface="Calibri" pitchFamily="34" charset="-120"/>
               </a:rPr>
-              <a:t>technical implementation</a:t>
+              <a:t>what the system does</a:t>
             </a:r>
             <a:endParaRPr lang="en-US" sz="1200" dirty="0"/>
           </a:p>
@@ -12336,7 +12336,7 @@
                 <a:ea typeface="Calibri" pitchFamily="34" charset="-122"/>
                 <a:cs typeface="Calibri" pitchFamily="34" charset="-120"/>
               </a:rPr>
-              <a:t>analytics dashboards,</a:t>
+              <a:t>how pages are rendered,</a:t>
             </a:r>
             <a:endParaRPr lang="en-US" sz="1200" dirty="0"/>
           </a:p>
@@ -12353,7 +12353,7 @@
                 <a:ea typeface="Calibri" pitchFamily="34" charset="-122"/>
                 <a:cs typeface="Calibri" pitchFamily="34" charset="-120"/>
               </a:rPr>
-              <a:t>business outcomes, demo support</a:t>
+              <a:t>analytics dashboards, demo support</a:t>
             </a:r>
             <a:endParaRPr lang="en-US" sz="1200" dirty="0"/>
           </a:p>

--- a/docs/presentation/ChargeHub-Presentation.pptx
+++ b/docs/presentation/ChargeHub-Presentation.pptx
@@ -1058,7 +1058,7 @@
           <a:p>
             <a:r>
               <a:rPr lang="en-US" dirty="0"/>
-              <a:t>Malik. This is the heart of the project.</a:t>
+              <a:t>Malik takes the optimizer and reliability (3:10). Abdel Aziz takes the deposit and refund rules (1:00) — they are enforced in the backend he built.</a:t>
             </a:r>
             <a:endParaRPr lang="en-US" dirty="0"/>
           </a:p>
@@ -1322,7 +1322,7 @@
           <a:p>
             <a:r>
               <a:rPr lang="en-US" dirty="0"/>
-              <a:t/>
+              <a:t>Abdel Aziz — the refund rules are enforced in one backend service, and only staff can set the operator-fault flag. Say the simulated-payments line out loud before anyone asks.</a:t>
             </a:r>
             <a:endParaRPr lang="en-US" dirty="0"/>
           </a:p>
@@ -1410,7 +1410,7 @@
           <a:p>
             <a:r>
               <a:rPr lang="en-US" dirty="0"/>
-              <a:t>Aya drives the screen. Abdel Aziz operates the staff side.</a:t>
+              <a:t>Aya drives the main journey (3:30). Abdel Aziz operates the staff window throughout, then runs the three short scenes (1:30).</a:t>
             </a:r>
             <a:endParaRPr lang="en-US" dirty="0"/>
           </a:p>
@@ -1586,7 +1586,7 @@
           <a:p>
             <a:r>
               <a:rPr lang="en-US" dirty="0"/>
-              <a:t>SWITCH TO THE APP HERE. Aya drives. Follow the presenter script.</a:t>
+              <a:t>SWITCH TO THE APP HERE. Aya drives the main journey; Abdel Aziz operates the staff window and then runs the three short scenes.</a:t>
             </a:r>
             <a:endParaRPr lang="en-US" dirty="0"/>
           </a:p>
@@ -1674,7 +1674,7 @@
           <a:p>
             <a:r>
               <a:rPr lang="en-US" dirty="0"/>
-              <a:t>Aya, then Malik for the business value.</a:t>
+              <a:t>Aya takes the results, then Malik for the business value, then Aya again for what is not built.</a:t>
             </a:r>
             <a:endParaRPr lang="en-US" dirty="0"/>
           </a:p>
@@ -1938,7 +1938,7 @@
           <a:p>
             <a:r>
               <a:rPr lang="en-US" dirty="0"/>
-              <a:t>Malik. Keep it short and honest.</a:t>
+              <a:t>Aya. Keep it short and honest — three properly, one sentence for the rest.</a:t>
             </a:r>
             <a:endParaRPr lang="en-US" dirty="0"/>
           </a:p>
@@ -2026,7 +2026,7 @@
           <a:p>
             <a:r>
               <a:rPr lang="en-US" dirty="0"/>
-              <a:t/>
+              <a:t>Aya. Do not read all six — take the first three properly, then one sentence for the rest. The check-out signal is the honest one to dwell on.</a:t>
             </a:r>
             <a:endParaRPr lang="en-US" dirty="0"/>
           </a:p>
@@ -2378,7 +2378,7 @@
           <a:p>
             <a:r>
               <a:rPr lang="en-US" dirty="0"/>
-              <a:t>Malik leads Q&amp;A. Abdel Aziz takes database and implementation questions. Aya takes interface and analytics questions.</a:t>
+              <a:t>Malik leads Q&amp;A. Abdel Aziz takes database, implementation and money questions. Aya takes interface, rendering, analytics and scope questions.</a:t>
             </a:r>
             <a:endParaRPr lang="en-US" dirty="0"/>
           </a:p>
@@ -11358,7 +11358,7 @@
                 <a:ea typeface="Calibri" pitchFamily="34" charset="-122"/>
                 <a:cs typeface="Calibri" pitchFamily="34" charset="-120"/>
               </a:rPr>
-              <a:t>Malik</a:t>
+              <a:t>Abdel Aziz</a:t>
             </a:r>
             <a:endParaRPr lang="en-US" sz="1000" dirty="0"/>
           </a:p>
@@ -12143,7 +12143,7 @@
                 <a:ea typeface="Calibri" pitchFamily="34" charset="-122"/>
                 <a:cs typeface="Calibri" pitchFamily="34" charset="-120"/>
               </a:rPr>
-              <a:t>what the system does</a:t>
+              <a:t>deposit and refund rules</a:t>
             </a:r>
             <a:endParaRPr lang="en-US" sz="1200" dirty="0"/>
           </a:p>
@@ -12353,7 +12353,7 @@
                 <a:ea typeface="Calibri" pitchFamily="34" charset="-122"/>
                 <a:cs typeface="Calibri" pitchFamily="34" charset="-120"/>
               </a:rPr>
-              <a:t>analytics dashboards, demo support</a:t>
+              <a:t>analytics dashboards, live demo</a:t>
             </a:r>
             <a:endParaRPr lang="en-US" sz="1200" dirty="0"/>
           </a:p>
@@ -14164,7 +14164,7 @@
                 <a:ea typeface="Calibri" pitchFamily="34" charset="-122"/>
                 <a:cs typeface="Calibri" pitchFamily="34" charset="-120"/>
               </a:rPr>
-              <a:t>Then three short scenes: a waitlisted driver promoted to a real booking · a reliability score built from real history · a broken charger reported and resolved.</a:t>
+              <a:t>Then Abdel Aziz runs three short scenes: a waitlisted driver promoted to a real booking · a reliability score built from real history · a broken charger reported and resolved.</a:t>
             </a:r>
             <a:endParaRPr lang="en-US" sz="1300" dirty="0"/>
           </a:p>
@@ -17694,7 +17694,7 @@
                 <a:ea typeface="Calibri" pitchFamily="34" charset="-122"/>
                 <a:cs typeface="Calibri" pitchFamily="34" charset="-120"/>
               </a:rPr>
-              <a:t>Malik</a:t>
+              <a:t>Aya</a:t>
             </a:r>
             <a:endParaRPr lang="en-US" sz="1000" dirty="0"/>
           </a:p>

--- a/docs/presentation/ChargeHub-Presentation.pptx
+++ b/docs/presentation/ChargeHub-Presentation.pptx
@@ -1676,7 +1676,7 @@
           <a:p>
             <a:r>
               <a:rPr lang="en-US" dirty="0"/>
-              <a:t>Aya drives the main journey (3:30). Abdel Aziz operates the staff window throughout, then runs the three short scenes (1:30).</a:t>
+              <a:t>Three recorded videos, 3:00 each. Each presenter narrates their own live over playback. Nothing here is performed live.</a:t>
             </a:r>
             <a:endParaRPr lang="en-US" dirty="0"/>
           </a:p>
@@ -1764,7 +1764,7 @@
           <a:p>
             <a:r>
               <a:rPr lang="en-US" dirty="0"/>
-              <a:t>SWITCH TO THE APP HERE. Aya drives the main journey; Abdel Aziz operates the staff window and then runs the three short scenes.</a:t>
+              <a:t>PLAY THE VIDEOS HERE, in order: Malik, Abdel Aziz, Aya. Each narrates their own live. Do not open the app — nothing is performed live.</a:t>
             </a:r>
             <a:endParaRPr lang="en-US" dirty="0"/>
           </a:p>
@@ -13206,7 +13206,7 @@
                 <a:ea typeface="Calibri" pitchFamily="34" charset="-122"/>
                 <a:cs typeface="Calibri" pitchFamily="34" charset="-120"/>
               </a:rPr>
-              <a:t>analytics dashboards, live demo</a:t>
+              <a:t>analytics dashboards, recorded demo</a:t>
             </a:r>
             <a:endParaRPr lang="en-US" sz="1200" dirty="0"/>
           </a:p>
@@ -14528,7 +14528,7 @@
                 <a:ea typeface="Cambria" pitchFamily="34" charset="-122"/>
                 <a:cs typeface="Cambria" pitchFamily="34" charset="-120"/>
               </a:rPr>
-              <a:t>Live demonstration</a:t>
+              <a:t>Recorded demonstrations</a:t>
             </a:r>
             <a:endParaRPr lang="en-US" sz="4200" dirty="0"/>
           </a:p>
@@ -14567,7 +14567,7 @@
                 <a:ea typeface="Calibri" pitchFamily="34" charset="-122"/>
                 <a:cs typeface="Calibri" pitchFamily="34" charset="-120"/>
               </a:rPr>
-              <a:t>One driver's journey, then three short scenes.</a:t>
+              <a:t>Three scenarios, each recorded end to end on the real system.</a:t>
             </a:r>
             <a:endParaRPr lang="en-US" sz="1600" dirty="0"/>
           </a:p>
@@ -16406,7 +16406,7 @@
                 <a:ea typeface="Calibri" pitchFamily="34" charset="-122"/>
                 <a:cs typeface="Calibri" pitchFamily="34" charset="-120"/>
               </a:rPr>
-              <a:t>Then Abdel Aziz runs three short scenes: a waitlisted driver promoted to a real booking · a reliability score built from real history · a broken charger reported and resolved.</a:t>
+              <a:t>Three recorded scenarios: a contested afternoon and how the optimizer resolves it · a charger failure and the delay it causes · time given back when a driver leaves early.</a:t>
             </a:r>
             <a:endParaRPr lang="en-US" sz="1300" dirty="0"/>
           </a:p>

--- a/docs/presentation/ChargeHub-Presentation.pptx
+++ b/docs/presentation/ChargeHub-Presentation.pptx
@@ -1681,7 +1681,7 @@
           <a:p>
             <a:r>
               <a:rPr lang="en-US" dirty="0"/>
-              <a:t>PLAY THE VIDEOS HERE, in order: Malik, Abdel Aziz, Aya. Each narrates their own live. Do not open the app — nothing is performed live.</a:t>
+              <a:t>Aya introduces all three, then hands to Malik whose video plays first. Do not read the proof lines — they are there for the examiners to read.</a:t>
             </a:r>
             <a:endParaRPr lang="en-US" dirty="0"/>
           </a:p>
@@ -14399,7 +14399,7 @@
                 <a:ea typeface="Cambria" pitchFamily="34" charset="-122"/>
                 <a:cs typeface="Cambria" pitchFamily="34" charset="-120"/>
               </a:rPr>
-              <a:t>What you are about to see</a:t>
+              <a:t>Three stories, recorded end to end</a:t>
             </a:r>
             <a:endParaRPr lang="en-US" sz="3400" dirty="0"/>
           </a:p>
@@ -14407,18 +14407,57 @@
       </p:sp>
       <p:sp>
         <p:nvSpPr>
-          <p:cNvPr id="4" name="Shape 2"/>
-          <p:cNvSpPr/>
-          <p:nvPr/>
-        </p:nvSpPr>
-        <p:spPr>
-          <a:xfrm>
-            <a:off x="548640" y="1645920"/>
-            <a:ext cx="3520440" cy="1060704"/>
+          <p:cNvPr id="4" name="Text 2"/>
+          <p:cNvSpPr/>
+          <p:nvPr/>
+        </p:nvSpPr>
+        <p:spPr>
+          <a:xfrm>
+            <a:off x="548640" y="1572768"/>
+            <a:ext cx="11064240" cy="365760"/>
+          </a:xfrm>
+          <a:prstGeom prst="rect">
+            <a:avLst/>
+          </a:prstGeom>
+          <a:noFill/>
+          <a:ln/>
+        </p:spPr>
+        <p:txBody>
+          <a:bodyPr wrap="square" lIns="0" tIns="0" rIns="0" bIns="0" rtlCol="0" anchor="ctr"/>
+          <a:lstStyle/>
+          <a:p>
+            <a:pPr indent="0" marL="0">
+              <a:buNone/>
+            </a:pPr>
+            <a:r>
+              <a:rPr lang="en-US" sz="1400" dirty="0">
+                <a:solidFill>
+                  <a:srgbClr val="101915"/>
+                </a:solidFill>
+                <a:latin typeface="Calibri" pitchFamily="34" charset="0"/>
+                <a:ea typeface="Calibri" pitchFamily="34" charset="-122"/>
+                <a:cs typeface="Calibri" pitchFamily="34" charset="-120"/>
+              </a:rPr>
+              <a:t>Each of us recorded one story on the real system, alone, at a different station. We narrate them live.</a:t>
+            </a:r>
+            <a:endParaRPr lang="en-US" sz="1400" dirty="0"/>
+          </a:p>
+        </p:txBody>
+      </p:sp>
+      <p:sp>
+        <p:nvSpPr>
+          <p:cNvPr id="5" name="Shape 3"/>
+          <p:cNvSpPr/>
+          <p:nvPr/>
+        </p:nvSpPr>
+        <p:spPr>
+          <a:xfrm>
+            <a:off x="548640" y="2103120"/>
+            <a:ext cx="11064240" cy="1188720"/>
           </a:xfrm>
           <a:prstGeom prst="roundRect">
             <a:avLst>
-              <a:gd name="adj" fmla="val 6897"/>
+              <a:gd name="adj" fmla="val 6154"/>
             </a:avLst>
           </a:prstGeom>
           <a:solidFill>
@@ -14441,17 +14480,19 @@
       </p:sp>
       <p:sp>
         <p:nvSpPr>
-          <p:cNvPr id="5" name="Shape 3"/>
-          <p:cNvSpPr/>
-          <p:nvPr/>
-        </p:nvSpPr>
-        <p:spPr>
-          <a:xfrm>
-            <a:off x="777240" y="1938528"/>
-            <a:ext cx="457200" cy="457200"/>
-          </a:xfrm>
-          <a:prstGeom prst="ellipse">
-            <a:avLst/>
+          <p:cNvPr id="6" name="Shape 4"/>
+          <p:cNvSpPr/>
+          <p:nvPr/>
+        </p:nvSpPr>
+        <p:spPr>
+          <a:xfrm>
+            <a:off x="777240" y="2286000"/>
+            <a:ext cx="1417320" cy="365760"/>
+          </a:xfrm>
+          <a:prstGeom prst="roundRect">
+            <a:avLst>
+              <a:gd name="adj" fmla="val 15000"/>
+            </a:avLst>
           </a:prstGeom>
           <a:solidFill>
             <a:srgbClr val="0E7A5F"/>
@@ -14466,14 +14507,14 @@
       </p:sp>
       <p:sp>
         <p:nvSpPr>
-          <p:cNvPr id="6" name="Text 4"/>
-          <p:cNvSpPr/>
-          <p:nvPr/>
-        </p:nvSpPr>
-        <p:spPr>
-          <a:xfrm>
-            <a:off x="777240" y="1938528"/>
-            <a:ext cx="457200" cy="457200"/>
+          <p:cNvPr id="7" name="Text 5"/>
+          <p:cNvSpPr/>
+          <p:nvPr/>
+        </p:nvSpPr>
+        <p:spPr>
+          <a:xfrm>
+            <a:off x="777240" y="2286000"/>
+            <a:ext cx="1417320" cy="365760"/>
           </a:xfrm>
           <a:prstGeom prst="rect">
             <a:avLst/>
@@ -14489,7 +14530,7 @@
               <a:buNone/>
             </a:pPr>
             <a:r>
-              <a:rPr lang="en-US" sz="1600" b="1" dirty="0">
+              <a:rPr lang="en-US" sz="1100" b="1" dirty="0">
                 <a:solidFill>
                   <a:srgbClr val="FFFFFF"/>
                 </a:solidFill>
@@ -14497,38 +14538,77 @@
                 <a:ea typeface="Calibri" pitchFamily="34" charset="-122"/>
                 <a:cs typeface="Calibri" pitchFamily="34" charset="-120"/>
               </a:rPr>
-              <a:t>1</a:t>
-            </a:r>
-            <a:endParaRPr lang="en-US" sz="1600" dirty="0"/>
-          </a:p>
-        </p:txBody>
-      </p:sp>
-      <p:sp>
-        <p:nvSpPr>
-          <p:cNvPr id="7" name="Text 5"/>
-          <p:cNvSpPr/>
-          <p:nvPr/>
-        </p:nvSpPr>
-        <p:spPr>
-          <a:xfrm>
-            <a:off x="1371600" y="1828800"/>
-            <a:ext cx="2560320" cy="292608"/>
-          </a:xfrm>
-          <a:prstGeom prst="rect">
-            <a:avLst/>
-          </a:prstGeom>
-          <a:noFill/>
-          <a:ln/>
-        </p:spPr>
-        <p:txBody>
-          <a:bodyPr wrap="square" lIns="0" tIns="0" rIns="0" bIns="0" rtlCol="0" anchor="ctr"/>
-          <a:lstStyle/>
-          <a:p>
-            <a:pPr indent="0" marL="0">
-              <a:buNone/>
-            </a:pPr>
-            <a:r>
-              <a:rPr lang="en-US" sz="1300" b="1" dirty="0">
+              <a:t>Malik</a:t>
+            </a:r>
+            <a:endParaRPr lang="en-US" sz="1100" dirty="0"/>
+          </a:p>
+        </p:txBody>
+      </p:sp>
+      <p:sp>
+        <p:nvSpPr>
+          <p:cNvPr id="8" name="Text 6"/>
+          <p:cNvSpPr/>
+          <p:nvPr/>
+        </p:nvSpPr>
+        <p:spPr>
+          <a:xfrm>
+            <a:off x="777240" y="2706624"/>
+            <a:ext cx="1417320" cy="256032"/>
+          </a:xfrm>
+          <a:prstGeom prst="rect">
+            <a:avLst/>
+          </a:prstGeom>
+          <a:noFill/>
+          <a:ln/>
+        </p:spPr>
+        <p:txBody>
+          <a:bodyPr wrap="square" lIns="0" tIns="0" rIns="0" bIns="0" rtlCol="0" anchor="ctr"/>
+          <a:lstStyle/>
+          <a:p>
+            <a:pPr algn="ctr" indent="0" marL="0">
+              <a:buNone/>
+            </a:pPr>
+            <a:r>
+              <a:rPr lang="en-US" sz="1000" dirty="0">
+                <a:solidFill>
+                  <a:srgbClr val="5B6B64"/>
+                </a:solidFill>
+                <a:latin typeface="Calibri" pitchFamily="34" charset="0"/>
+                <a:ea typeface="Calibri" pitchFamily="34" charset="-122"/>
+                <a:cs typeface="Calibri" pitchFamily="34" charset="-120"/>
+              </a:rPr>
+              <a:t>Downtown</a:t>
+            </a:r>
+            <a:endParaRPr lang="en-US" sz="1000" dirty="0"/>
+          </a:p>
+        </p:txBody>
+      </p:sp>
+      <p:sp>
+        <p:nvSpPr>
+          <p:cNvPr id="9" name="Text 7"/>
+          <p:cNvSpPr/>
+          <p:nvPr/>
+        </p:nvSpPr>
+        <p:spPr>
+          <a:xfrm>
+            <a:off x="2377440" y="2231136"/>
+            <a:ext cx="9052560" cy="274320"/>
+          </a:xfrm>
+          <a:prstGeom prst="rect">
+            <a:avLst/>
+          </a:prstGeom>
+          <a:noFill/>
+          <a:ln/>
+        </p:spPr>
+        <p:txBody>
+          <a:bodyPr wrap="square" lIns="0" tIns="0" rIns="0" bIns="0" rtlCol="0" anchor="ctr"/>
+          <a:lstStyle/>
+          <a:p>
+            <a:pPr indent="0" marL="0">
+              <a:buNone/>
+            </a:pPr>
+            <a:r>
+              <a:rPr lang="en-US" sz="1450" b="1" dirty="0">
                 <a:solidFill>
                   <a:srgbClr val="101915"/>
                 </a:solidFill>
@@ -14536,38 +14616,38 @@
                 <a:ea typeface="Calibri" pitchFamily="34" charset="-122"/>
                 <a:cs typeface="Calibri" pitchFamily="34" charset="-120"/>
               </a:rPr>
-              <a:t>Anna books</a:t>
-            </a:r>
-            <a:endParaRPr lang="en-US" sz="1300" dirty="0"/>
-          </a:p>
-        </p:txBody>
-      </p:sp>
-      <p:sp>
-        <p:nvSpPr>
-          <p:cNvPr id="8" name="Text 6"/>
-          <p:cNvSpPr/>
-          <p:nvPr/>
-        </p:nvSpPr>
-        <p:spPr>
-          <a:xfrm>
-            <a:off x="1371600" y="2121408"/>
-            <a:ext cx="2560320" cy="502920"/>
-          </a:xfrm>
-          <a:prstGeom prst="rect">
-            <a:avLst/>
-          </a:prstGeom>
-          <a:noFill/>
-          <a:ln/>
-        </p:spPr>
-        <p:txBody>
-          <a:bodyPr wrap="square" lIns="0" tIns="0" rIns="0" bIns="0" rtlCol="0" anchor="ctr"/>
-          <a:lstStyle/>
-          <a:p>
-            <a:pPr indent="0" marL="0">
-              <a:buNone/>
-            </a:pPr>
-            <a:r>
-              <a:rPr lang="en-US" sz="1050" dirty="0">
+              <a:t>The contested afternoon</a:t>
+            </a:r>
+            <a:endParaRPr lang="en-US" sz="1450" dirty="0"/>
+          </a:p>
+        </p:txBody>
+      </p:sp>
+      <p:sp>
+        <p:nvSpPr>
+          <p:cNvPr id="10" name="Text 8"/>
+          <p:cNvSpPr/>
+          <p:nvPr/>
+        </p:nvSpPr>
+        <p:spPr>
+          <a:xfrm>
+            <a:off x="2377440" y="2505456"/>
+            <a:ext cx="9052560" cy="457200"/>
+          </a:xfrm>
+          <a:prstGeom prst="rect">
+            <a:avLst/>
+          </a:prstGeom>
+          <a:noFill/>
+          <a:ln/>
+        </p:spPr>
+        <p:txBody>
+          <a:bodyPr wrap="square" lIns="0" tIns="0" rIns="0" bIns="0" rtlCol="0" anchor="ctr"/>
+          <a:lstStyle/>
+          <a:p>
+            <a:pPr indent="0" marL="0">
+              <a:buNone/>
+            </a:pPr>
+            <a:r>
+              <a:rPr lang="en-US" sz="1100" dirty="0">
                 <a:solidFill>
                   <a:srgbClr val="5B6B64"/>
                 </a:solidFill>
@@ -14575,26 +14655,65 @@
                 <a:ea typeface="Calibri" pitchFamily="34" charset="-122"/>
                 <a:cs typeface="Calibri" pitchFamily="34" charset="-120"/>
               </a:rPr>
-              <a:t>Picks a station and a 60-minute slot</a:t>
-            </a:r>
-            <a:endParaRPr lang="en-US" sz="1050" dirty="0"/>
-          </a:p>
-        </p:txBody>
-      </p:sp>
-      <p:sp>
-        <p:nvSpPr>
-          <p:cNvPr id="9" name="Shape 7"/>
-          <p:cNvSpPr/>
-          <p:nvPr/>
-        </p:nvSpPr>
-        <p:spPr>
-          <a:xfrm>
-            <a:off x="4297680" y="1645920"/>
-            <a:ext cx="3520440" cy="1060704"/>
+              <a:t>Two drivers reach for the same charger. One is refused by the database. Then a driver who is flexible describes a window instead, and the system plans everyone at once — and shows its reasoning.</a:t>
+            </a:r>
+            <a:endParaRPr lang="en-US" sz="1100" dirty="0"/>
+          </a:p>
+        </p:txBody>
+      </p:sp>
+      <p:sp>
+        <p:nvSpPr>
+          <p:cNvPr id="11" name="Text 9"/>
+          <p:cNvSpPr/>
+          <p:nvPr/>
+        </p:nvSpPr>
+        <p:spPr>
+          <a:xfrm>
+            <a:off x="2377440" y="2980944"/>
+            <a:ext cx="9052560" cy="237744"/>
+          </a:xfrm>
+          <a:prstGeom prst="rect">
+            <a:avLst/>
+          </a:prstGeom>
+          <a:noFill/>
+          <a:ln/>
+        </p:spPr>
+        <p:txBody>
+          <a:bodyPr wrap="square" lIns="0" tIns="0" rIns="0" bIns="0" rtlCol="0" anchor="ctr"/>
+          <a:lstStyle/>
+          <a:p>
+            <a:pPr indent="0" marL="0">
+              <a:buNone/>
+            </a:pPr>
+            <a:r>
+              <a:rPr lang="en-US" sz="1000" i="1" dirty="0">
+                <a:solidFill>
+                  <a:srgbClr val="0E7A5F"/>
+                </a:solidFill>
+                <a:latin typeface="Calibri" pitchFamily="34" charset="0"/>
+                <a:ea typeface="Calibri" pitchFamily="34" charset="-122"/>
+                <a:cs typeface="Calibri" pitchFamily="34" charset="-120"/>
+              </a:rPr>
+              <a:t>One block, one owner · back-to-back bookings · five-factor scoring · first-come-first-served comparison · a held offer</a:t>
+            </a:r>
+            <a:endParaRPr lang="en-US" sz="1000" dirty="0"/>
+          </a:p>
+        </p:txBody>
+      </p:sp>
+      <p:sp>
+        <p:nvSpPr>
+          <p:cNvPr id="12" name="Shape 10"/>
+          <p:cNvSpPr/>
+          <p:nvPr/>
+        </p:nvSpPr>
+        <p:spPr>
+          <a:xfrm>
+            <a:off x="548640" y="3401568"/>
+            <a:ext cx="11064240" cy="1188720"/>
           </a:xfrm>
           <a:prstGeom prst="roundRect">
             <a:avLst>
-              <a:gd name="adj" fmla="val 6897"/>
+              <a:gd name="adj" fmla="val 6154"/>
             </a:avLst>
           </a:prstGeom>
           <a:solidFill>
@@ -14617,17 +14736,19 @@
       </p:sp>
       <p:sp>
         <p:nvSpPr>
-          <p:cNvPr id="10" name="Shape 8"/>
-          <p:cNvSpPr/>
-          <p:nvPr/>
-        </p:nvSpPr>
-        <p:spPr>
-          <a:xfrm>
-            <a:off x="4526280" y="1938528"/>
-            <a:ext cx="457200" cy="457200"/>
-          </a:xfrm>
-          <a:prstGeom prst="ellipse">
-            <a:avLst/>
+          <p:cNvPr id="13" name="Shape 11"/>
+          <p:cNvSpPr/>
+          <p:nvPr/>
+        </p:nvSpPr>
+        <p:spPr>
+          <a:xfrm>
+            <a:off x="777240" y="3584448"/>
+            <a:ext cx="1417320" cy="365760"/>
+          </a:xfrm>
+          <a:prstGeom prst="roundRect">
+            <a:avLst>
+              <a:gd name="adj" fmla="val 15000"/>
+            </a:avLst>
           </a:prstGeom>
           <a:solidFill>
             <a:srgbClr val="0E7A5F"/>
@@ -14642,14 +14763,14 @@
       </p:sp>
       <p:sp>
         <p:nvSpPr>
-          <p:cNvPr id="11" name="Text 9"/>
-          <p:cNvSpPr/>
-          <p:nvPr/>
-        </p:nvSpPr>
-        <p:spPr>
-          <a:xfrm>
-            <a:off x="4526280" y="1938528"/>
-            <a:ext cx="457200" cy="457200"/>
+          <p:cNvPr id="14" name="Text 12"/>
+          <p:cNvSpPr/>
+          <p:nvPr/>
+        </p:nvSpPr>
+        <p:spPr>
+          <a:xfrm>
+            <a:off x="777240" y="3584448"/>
+            <a:ext cx="1417320" cy="365760"/>
           </a:xfrm>
           <a:prstGeom prst="rect">
             <a:avLst/>
@@ -14665,7 +14786,7 @@
               <a:buNone/>
             </a:pPr>
             <a:r>
-              <a:rPr lang="en-US" sz="1600" b="1" dirty="0">
+              <a:rPr lang="en-US" sz="1100" b="1" dirty="0">
                 <a:solidFill>
                   <a:srgbClr val="FFFFFF"/>
                 </a:solidFill>
@@ -14673,38 +14794,77 @@
                 <a:ea typeface="Calibri" pitchFamily="34" charset="-122"/>
                 <a:cs typeface="Calibri" pitchFamily="34" charset="-120"/>
               </a:rPr>
-              <a:t>2</a:t>
-            </a:r>
-            <a:endParaRPr lang="en-US" sz="1600" dirty="0"/>
-          </a:p>
-        </p:txBody>
-      </p:sp>
-      <p:sp>
-        <p:nvSpPr>
-          <p:cNvPr id="12" name="Text 10"/>
-          <p:cNvSpPr/>
-          <p:nvPr/>
-        </p:nvSpPr>
-        <p:spPr>
-          <a:xfrm>
-            <a:off x="5120640" y="1828800"/>
-            <a:ext cx="2560320" cy="292608"/>
-          </a:xfrm>
-          <a:prstGeom prst="rect">
-            <a:avLst/>
-          </a:prstGeom>
-          <a:noFill/>
-          <a:ln/>
-        </p:spPr>
-        <p:txBody>
-          <a:bodyPr wrap="square" lIns="0" tIns="0" rIns="0" bIns="0" rtlCol="0" anchor="ctr"/>
-          <a:lstStyle/>
-          <a:p>
-            <a:pPr indent="0" marL="0">
-              <a:buNone/>
-            </a:pPr>
-            <a:r>
-              <a:rPr lang="en-US" sz="1300" b="1" dirty="0">
+              <a:t>Abdel Aziz</a:t>
+            </a:r>
+            <a:endParaRPr lang="en-US" sz="1100" dirty="0"/>
+          </a:p>
+        </p:txBody>
+      </p:sp>
+      <p:sp>
+        <p:nvSpPr>
+          <p:cNvPr id="15" name="Text 13"/>
+          <p:cNvSpPr/>
+          <p:nvPr/>
+        </p:nvSpPr>
+        <p:spPr>
+          <a:xfrm>
+            <a:off x="777240" y="4005072"/>
+            <a:ext cx="1417320" cy="256032"/>
+          </a:xfrm>
+          <a:prstGeom prst="rect">
+            <a:avLst/>
+          </a:prstGeom>
+          <a:noFill/>
+          <a:ln/>
+        </p:spPr>
+        <p:txBody>
+          <a:bodyPr wrap="square" lIns="0" tIns="0" rIns="0" bIns="0" rtlCol="0" anchor="ctr"/>
+          <a:lstStyle/>
+          <a:p>
+            <a:pPr algn="ctr" indent="0" marL="0">
+              <a:buNone/>
+            </a:pPr>
+            <a:r>
+              <a:rPr lang="en-US" sz="1000" dirty="0">
+                <a:solidFill>
+                  <a:srgbClr val="5B6B64"/>
+                </a:solidFill>
+                <a:latin typeface="Calibri" pitchFamily="34" charset="0"/>
+                <a:ea typeface="Calibri" pitchFamily="34" charset="-122"/>
+                <a:cs typeface="Calibri" pitchFamily="34" charset="-120"/>
+              </a:rPr>
+              <a:t>Airport</a:t>
+            </a:r>
+            <a:endParaRPr lang="en-US" sz="1000" dirty="0"/>
+          </a:p>
+        </p:txBody>
+      </p:sp>
+      <p:sp>
+        <p:nvSpPr>
+          <p:cNvPr id="16" name="Text 14"/>
+          <p:cNvSpPr/>
+          <p:nvPr/>
+        </p:nvSpPr>
+        <p:spPr>
+          <a:xfrm>
+            <a:off x="2377440" y="3529584"/>
+            <a:ext cx="9052560" cy="274320"/>
+          </a:xfrm>
+          <a:prstGeom prst="rect">
+            <a:avLst/>
+          </a:prstGeom>
+          <a:noFill/>
+          <a:ln/>
+        </p:spPr>
+        <p:txBody>
+          <a:bodyPr wrap="square" lIns="0" tIns="0" rIns="0" bIns="0" rtlCol="0" anchor="ctr"/>
+          <a:lstStyle/>
+          <a:p>
+            <a:pPr indent="0" marL="0">
+              <a:buNone/>
+            </a:pPr>
+            <a:r>
+              <a:rPr lang="en-US" sz="1450" b="1" dirty="0">
                 <a:solidFill>
                   <a:srgbClr val="101915"/>
                 </a:solidFill>
@@ -14712,38 +14872,38 @@
                 <a:ea typeface="Calibri" pitchFamily="34" charset="-122"/>
                 <a:cs typeface="Calibri" pitchFamily="34" charset="-120"/>
               </a:rPr>
-              <a:t>Pays a deposit</a:t>
-            </a:r>
-            <a:endParaRPr lang="en-US" sz="1300" dirty="0"/>
-          </a:p>
-        </p:txBody>
-      </p:sp>
-      <p:sp>
-        <p:nvSpPr>
-          <p:cNvPr id="13" name="Text 11"/>
-          <p:cNvSpPr/>
-          <p:nvPr/>
-        </p:nvSpPr>
-        <p:spPr>
-          <a:xfrm>
-            <a:off x="5120640" y="2121408"/>
-            <a:ext cx="2560320" cy="502920"/>
-          </a:xfrm>
-          <a:prstGeom prst="rect">
-            <a:avLst/>
-          </a:prstGeom>
-          <a:noFill/>
-          <a:ln/>
-        </p:spPr>
-        <p:txBody>
-          <a:bodyPr wrap="square" lIns="0" tIns="0" rIns="0" bIns="0" rtlCol="0" anchor="ctr"/>
-          <a:lstStyle/>
-          <a:p>
-            <a:pPr indent="0" marL="0">
-              <a:buNone/>
-            </a:pPr>
-            <a:r>
-              <a:rPr lang="en-US" sz="1050" dirty="0">
+              <a:t>The station that broke</a:t>
+            </a:r>
+            <a:endParaRPr lang="en-US" sz="1450" dirty="0"/>
+          </a:p>
+        </p:txBody>
+      </p:sp>
+      <p:sp>
+        <p:nvSpPr>
+          <p:cNvPr id="17" name="Text 15"/>
+          <p:cNvSpPr/>
+          <p:nvPr/>
+        </p:nvSpPr>
+        <p:spPr>
+          <a:xfrm>
+            <a:off x="2377440" y="3803904"/>
+            <a:ext cx="9052560" cy="457200"/>
+          </a:xfrm>
+          <a:prstGeom prst="rect">
+            <a:avLst/>
+          </a:prstGeom>
+          <a:noFill/>
+          <a:ln/>
+        </p:spPr>
+        <p:txBody>
+          <a:bodyPr wrap="square" lIns="0" tIns="0" rIns="0" bIns="0" rtlCol="0" anchor="ctr"/>
+          <a:lstStyle/>
+          <a:p>
+            <a:pPr indent="0" marL="0">
+              <a:buNone/>
+            </a:pPr>
+            <a:r>
+              <a:rPr lang="en-US" sz="1100" dirty="0">
                 <a:solidFill>
                   <a:srgbClr val="5B6B64"/>
                 </a:solidFill>
@@ -14751,26 +14911,65 @@
                 <a:ea typeface="Calibri" pitchFamily="34" charset="-122"/>
                 <a:cs typeface="Calibri" pitchFamily="34" charset="-120"/>
               </a:rPr>
-              <a:t>The booking is now confirmed</a:t>
-            </a:r>
-            <a:endParaRPr lang="en-US" sz="1050" dirty="0"/>
-          </a:p>
-        </p:txBody>
-      </p:sp>
-      <p:sp>
-        <p:nvSpPr>
-          <p:cNvPr id="14" name="Shape 12"/>
-          <p:cNvSpPr/>
-          <p:nvPr/>
-        </p:nvSpPr>
-        <p:spPr>
-          <a:xfrm>
-            <a:off x="8046720" y="1645920"/>
-            <a:ext cx="3520440" cy="1060704"/>
+              <a:t>A driver books, pays, and is checked in from her code. Then a charger fails. The system works out who is affected and how far the delay reaches — and stops there.</a:t>
+            </a:r>
+            <a:endParaRPr lang="en-US" sz="1100" dirty="0"/>
+          </a:p>
+        </p:txBody>
+      </p:sp>
+      <p:sp>
+        <p:nvSpPr>
+          <p:cNvPr id="18" name="Text 16"/>
+          <p:cNvSpPr/>
+          <p:nvPr/>
+        </p:nvSpPr>
+        <p:spPr>
+          <a:xfrm>
+            <a:off x="2377440" y="4279392"/>
+            <a:ext cx="9052560" cy="237744"/>
+          </a:xfrm>
+          <a:prstGeom prst="rect">
+            <a:avLst/>
+          </a:prstGeom>
+          <a:noFill/>
+          <a:ln/>
+        </p:spPr>
+        <p:txBody>
+          <a:bodyPr wrap="square" lIns="0" tIns="0" rIns="0" bIns="0" rtlCol="0" anchor="ctr"/>
+          <a:lstStyle/>
+          <a:p>
+            <a:pPr indent="0" marL="0">
+              <a:buNone/>
+            </a:pPr>
+            <a:r>
+              <a:rPr lang="en-US" sz="1000" i="1" dirty="0">
+                <a:solidFill>
+                  <a:srgbClr val="0E7A5F"/>
+                </a:solidFill>
+                <a:latin typeface="Calibri" pitchFamily="34" charset="0"/>
+                <a:ea typeface="Calibri" pitchFamily="34" charset="-122"/>
+                <a:cs typeface="Calibri" pitchFamily="34" charset="-120"/>
+              </a:rPr>
+              <a:t>QR check-in · arrival classified automatically · incident lifecycle · delay recommended, never applied · our-fault refund · station scope</a:t>
+            </a:r>
+            <a:endParaRPr lang="en-US" sz="1000" dirty="0"/>
+          </a:p>
+        </p:txBody>
+      </p:sp>
+      <p:sp>
+        <p:nvSpPr>
+          <p:cNvPr id="19" name="Shape 17"/>
+          <p:cNvSpPr/>
+          <p:nvPr/>
+        </p:nvSpPr>
+        <p:spPr>
+          <a:xfrm>
+            <a:off x="548640" y="4700016"/>
+            <a:ext cx="11064240" cy="1188720"/>
           </a:xfrm>
           <a:prstGeom prst="roundRect">
             <a:avLst>
-              <a:gd name="adj" fmla="val 6897"/>
+              <a:gd name="adj" fmla="val 6154"/>
             </a:avLst>
           </a:prstGeom>
           <a:solidFill>
@@ -14793,17 +14992,19 @@
       </p:sp>
       <p:sp>
         <p:nvSpPr>
-          <p:cNvPr id="15" name="Shape 13"/>
-          <p:cNvSpPr/>
-          <p:nvPr/>
-        </p:nvSpPr>
-        <p:spPr>
-          <a:xfrm>
-            <a:off x="8275320" y="1938528"/>
-            <a:ext cx="457200" cy="457200"/>
-          </a:xfrm>
-          <a:prstGeom prst="ellipse">
-            <a:avLst/>
+          <p:cNvPr id="20" name="Shape 18"/>
+          <p:cNvSpPr/>
+          <p:nvPr/>
+        </p:nvSpPr>
+        <p:spPr>
+          <a:xfrm>
+            <a:off x="777240" y="4882896"/>
+            <a:ext cx="1417320" cy="365760"/>
+          </a:xfrm>
+          <a:prstGeom prst="roundRect">
+            <a:avLst>
+              <a:gd name="adj" fmla="val 15000"/>
+            </a:avLst>
           </a:prstGeom>
           <a:solidFill>
             <a:srgbClr val="0E7A5F"/>
@@ -14818,14 +15019,14 @@
       </p:sp>
       <p:sp>
         <p:nvSpPr>
-          <p:cNvPr id="16" name="Text 14"/>
-          <p:cNvSpPr/>
-          <p:nvPr/>
-        </p:nvSpPr>
-        <p:spPr>
-          <a:xfrm>
-            <a:off x="8275320" y="1938528"/>
-            <a:ext cx="457200" cy="457200"/>
+          <p:cNvPr id="21" name="Text 19"/>
+          <p:cNvSpPr/>
+          <p:nvPr/>
+        </p:nvSpPr>
+        <p:spPr>
+          <a:xfrm>
+            <a:off x="777240" y="4882896"/>
+            <a:ext cx="1417320" cy="365760"/>
           </a:xfrm>
           <a:prstGeom prst="rect">
             <a:avLst/>
@@ -14841,7 +15042,7 @@
               <a:buNone/>
             </a:pPr>
             <a:r>
-              <a:rPr lang="en-US" sz="1600" b="1" dirty="0">
+              <a:rPr lang="en-US" sz="1100" b="1" dirty="0">
                 <a:solidFill>
                   <a:srgbClr val="FFFFFF"/>
                 </a:solidFill>
@@ -14849,38 +15050,77 @@
                 <a:ea typeface="Calibri" pitchFamily="34" charset="-122"/>
                 <a:cs typeface="Calibri" pitchFamily="34" charset="-120"/>
               </a:rPr>
-              <a:t>3</a:t>
-            </a:r>
-            <a:endParaRPr lang="en-US" sz="1600" dirty="0"/>
-          </a:p>
-        </p:txBody>
-      </p:sp>
-      <p:sp>
-        <p:nvSpPr>
-          <p:cNvPr id="17" name="Text 15"/>
-          <p:cNvSpPr/>
-          <p:nvPr/>
-        </p:nvSpPr>
-        <p:spPr>
-          <a:xfrm>
-            <a:off x="8869680" y="1828800"/>
-            <a:ext cx="2560320" cy="292608"/>
-          </a:xfrm>
-          <a:prstGeom prst="rect">
-            <a:avLst/>
-          </a:prstGeom>
-          <a:noFill/>
-          <a:ln/>
-        </p:spPr>
-        <p:txBody>
-          <a:bodyPr wrap="square" lIns="0" tIns="0" rIns="0" bIns="0" rtlCol="0" anchor="ctr"/>
-          <a:lstStyle/>
-          <a:p>
-            <a:pPr indent="0" marL="0">
-              <a:buNone/>
-            </a:pPr>
-            <a:r>
-              <a:rPr lang="en-US" sz="1300" b="1" dirty="0">
+              <a:t>Aya</a:t>
+            </a:r>
+            <a:endParaRPr lang="en-US" sz="1100" dirty="0"/>
+          </a:p>
+        </p:txBody>
+      </p:sp>
+      <p:sp>
+        <p:nvSpPr>
+          <p:cNvPr id="22" name="Text 20"/>
+          <p:cNvSpPr/>
+          <p:nvPr/>
+        </p:nvSpPr>
+        <p:spPr>
+          <a:xfrm>
+            <a:off x="777240" y="5303520"/>
+            <a:ext cx="1417320" cy="256032"/>
+          </a:xfrm>
+          <a:prstGeom prst="rect">
+            <a:avLst/>
+          </a:prstGeom>
+          <a:noFill/>
+          <a:ln/>
+        </p:spPr>
+        <p:txBody>
+          <a:bodyPr wrap="square" lIns="0" tIns="0" rIns="0" bIns="0" rtlCol="0" anchor="ctr"/>
+          <a:lstStyle/>
+          <a:p>
+            <a:pPr algn="ctr" indent="0" marL="0">
+              <a:buNone/>
+            </a:pPr>
+            <a:r>
+              <a:rPr lang="en-US" sz="1000" dirty="0">
+                <a:solidFill>
+                  <a:srgbClr val="5B6B64"/>
+                </a:solidFill>
+                <a:latin typeface="Calibri" pitchFamily="34" charset="0"/>
+                <a:ea typeface="Calibri" pitchFamily="34" charset="-122"/>
+                <a:cs typeface="Calibri" pitchFamily="34" charset="-120"/>
+              </a:rPr>
+              <a:t>Marina</a:t>
+            </a:r>
+            <a:endParaRPr lang="en-US" sz="1000" dirty="0"/>
+          </a:p>
+        </p:txBody>
+      </p:sp>
+      <p:sp>
+        <p:nvSpPr>
+          <p:cNvPr id="23" name="Text 21"/>
+          <p:cNvSpPr/>
+          <p:nvPr/>
+        </p:nvSpPr>
+        <p:spPr>
+          <a:xfrm>
+            <a:off x="2377440" y="4828032"/>
+            <a:ext cx="9052560" cy="274320"/>
+          </a:xfrm>
+          <a:prstGeom prst="rect">
+            <a:avLst/>
+          </a:prstGeom>
+          <a:noFill/>
+          <a:ln/>
+        </p:spPr>
+        <p:txBody>
+          <a:bodyPr wrap="square" lIns="0" tIns="0" rIns="0" bIns="0" rtlCol="0" anchor="ctr"/>
+          <a:lstStyle/>
+          <a:p>
+            <a:pPr indent="0" marL="0">
+              <a:buNone/>
+            </a:pPr>
+            <a:r>
+              <a:rPr lang="en-US" sz="1450" b="1" dirty="0">
                 <a:solidFill>
                   <a:srgbClr val="101915"/>
                 </a:solidFill>
@@ -14888,7 +15128,124 @@
                 <a:ea typeface="Calibri" pitchFamily="34" charset="-122"/>
                 <a:cs typeface="Calibri" pitchFamily="34" charset="-120"/>
               </a:rPr>
-              <a:t>Gets a QR code</a:t>
+              <a:t>Nothing is wasted</a:t>
+            </a:r>
+            <a:endParaRPr lang="en-US" sz="1450" dirty="0"/>
+          </a:p>
+        </p:txBody>
+      </p:sp>
+      <p:sp>
+        <p:nvSpPr>
+          <p:cNvPr id="24" name="Text 22"/>
+          <p:cNvSpPr/>
+          <p:nvPr/>
+        </p:nvSpPr>
+        <p:spPr>
+          <a:xfrm>
+            <a:off x="2377440" y="5102352"/>
+            <a:ext cx="9052560" cy="457200"/>
+          </a:xfrm>
+          <a:prstGeom prst="rect">
+            <a:avLst/>
+          </a:prstGeom>
+          <a:noFill/>
+          <a:ln/>
+        </p:spPr>
+        <p:txBody>
+          <a:bodyPr wrap="square" lIns="0" tIns="0" rIns="0" bIns="0" rtlCol="0" anchor="ctr"/>
+          <a:lstStyle/>
+          <a:p>
+            <a:pPr indent="0" marL="0">
+              <a:buNone/>
+            </a:pPr>
+            <a:r>
+              <a:rPr lang="en-US" sz="1100" dirty="0">
+                <a:solidFill>
+                  <a:srgbClr val="5B6B64"/>
+                </a:solidFill>
+                <a:latin typeface="Calibri" pitchFamily="34" charset="0"/>
+                <a:ea typeface="Calibri" pitchFamily="34" charset="-122"/>
+                <a:cs typeface="Calibri" pitchFamily="34" charset="-120"/>
+              </a:rPr>
+              <a:t>One driver is turned away because nothing is free. Another finishes early. Within a minute the freed time is sold to the driver who was waiting.</a:t>
+            </a:r>
+            <a:endParaRPr lang="en-US" sz="1100" dirty="0"/>
+          </a:p>
+        </p:txBody>
+      </p:sp>
+      <p:sp>
+        <p:nvSpPr>
+          <p:cNvPr id="25" name="Text 23"/>
+          <p:cNvSpPr/>
+          <p:nvPr/>
+        </p:nvSpPr>
+        <p:spPr>
+          <a:xfrm>
+            <a:off x="2377440" y="5577840"/>
+            <a:ext cx="9052560" cy="237744"/>
+          </a:xfrm>
+          <a:prstGeom prst="rect">
+            <a:avLst/>
+          </a:prstGeom>
+          <a:noFill/>
+          <a:ln/>
+        </p:spPr>
+        <p:txBody>
+          <a:bodyPr wrap="square" lIns="0" tIns="0" rIns="0" bIns="0" rtlCol="0" anchor="ctr"/>
+          <a:lstStyle/>
+          <a:p>
+            <a:pPr indent="0" marL="0">
+              <a:buNone/>
+            </a:pPr>
+            <a:r>
+              <a:rPr lang="en-US" sz="1000" i="1" dirty="0">
+                <a:solidFill>
+                  <a:srgbClr val="0E7A5F"/>
+                </a:solidFill>
+                <a:latin typeface="Calibri" pitchFamily="34" charset="0"/>
+                <a:ea typeface="Calibri" pitchFamily="34" charset="-122"/>
+                <a:cs typeface="Calibri" pitchFamily="34" charset="-120"/>
+              </a:rPr>
+              <a:t>Waitlist kept alive · early departure returns capacity · automatic promotion · extensions granted, partly granted and refused · 31 measurements</a:t>
+            </a:r>
+            <a:endParaRPr lang="en-US" sz="1000" dirty="0"/>
+          </a:p>
+        </p:txBody>
+      </p:sp>
+      <p:sp>
+        <p:nvSpPr>
+          <p:cNvPr id="26" name="Text 24"/>
+          <p:cNvSpPr/>
+          <p:nvPr/>
+        </p:nvSpPr>
+        <p:spPr>
+          <a:xfrm>
+            <a:off x="548640" y="6126480"/>
+            <a:ext cx="11064240" cy="320040"/>
+          </a:xfrm>
+          <a:prstGeom prst="rect">
+            <a:avLst/>
+          </a:prstGeom>
+          <a:noFill/>
+          <a:ln/>
+        </p:spPr>
+        <p:txBody>
+          <a:bodyPr wrap="square" lIns="0" tIns="0" rIns="0" bIns="0" rtlCol="0" anchor="ctr"/>
+          <a:lstStyle/>
+          <a:p>
+            <a:pPr indent="0" marL="0">
+              <a:buNone/>
+            </a:pPr>
+            <a:r>
+              <a:rPr lang="en-US" sz="1300" b="1" i="1" dirty="0">
+                <a:solidFill>
+                  <a:srgbClr val="0E7A5F"/>
+                </a:solidFill>
+                <a:latin typeface="Calibri" pitchFamily="34" charset="0"/>
+                <a:ea typeface="Calibri" pitchFamily="34" charset="-122"/>
+                <a:cs typeface="Calibri" pitchFamily="34" charset="-120"/>
+              </a:rPr>
+              <a:t>Nothing was staged. Every click ran against the same database the dashboards read from.</a:t>
             </a:r>
             <a:endParaRPr lang="en-US" sz="1300" dirty="0"/>
           </a:p>
@@ -14896,1141 +15253,7 @@
       </p:sp>
       <p:sp>
         <p:nvSpPr>
-          <p:cNvPr id="18" name="Text 16"/>
-          <p:cNvSpPr/>
-          <p:nvPr/>
-        </p:nvSpPr>
-        <p:spPr>
-          <a:xfrm>
-            <a:off x="8869680" y="2121408"/>
-            <a:ext cx="2560320" cy="502920"/>
-          </a:xfrm>
-          <a:prstGeom prst="rect">
-            <a:avLst/>
-          </a:prstGeom>
-          <a:noFill/>
-          <a:ln/>
-        </p:spPr>
-        <p:txBody>
-          <a:bodyPr wrap="square" lIns="0" tIns="0" rIns="0" bIns="0" rtlCol="0" anchor="ctr"/>
-          <a:lstStyle/>
-          <a:p>
-            <a:pPr indent="0" marL="0">
-              <a:buNone/>
-            </a:pPr>
-            <a:r>
-              <a:rPr lang="en-US" sz="1050" dirty="0">
-                <a:solidFill>
-                  <a:srgbClr val="5B6B64"/>
-                </a:solidFill>
-                <a:latin typeface="Calibri" pitchFamily="34" charset="0"/>
-                <a:ea typeface="Calibri" pitchFamily="34" charset="-122"/>
-                <a:cs typeface="Calibri" pitchFamily="34" charset="-120"/>
-              </a:rPr>
-              <a:t>On her confirmation screen</a:t>
-            </a:r>
-            <a:endParaRPr lang="en-US" sz="1050" dirty="0"/>
-          </a:p>
-        </p:txBody>
-      </p:sp>
-      <p:sp>
-        <p:nvSpPr>
-          <p:cNvPr id="19" name="Shape 17"/>
-          <p:cNvSpPr/>
-          <p:nvPr/>
-        </p:nvSpPr>
-        <p:spPr>
-          <a:xfrm>
-            <a:off x="548640" y="2852928"/>
-            <a:ext cx="3520440" cy="1060704"/>
-          </a:xfrm>
-          <a:prstGeom prst="roundRect">
-            <a:avLst>
-              <a:gd name="adj" fmla="val 6897"/>
-            </a:avLst>
-          </a:prstGeom>
-          <a:solidFill>
-            <a:srgbClr val="FFFFFF"/>
-          </a:solidFill>
-          <a:ln w="12700">
-            <a:solidFill>
-              <a:srgbClr val="E3EAE6"/>
-            </a:solidFill>
-            <a:prstDash val="solid"/>
-          </a:ln>
-          <a:effectLst>
-            <a:outerShdw sx="100000" sy="100000" kx="0" ky="0" algn="bl" rotWithShape="0" blurRad="76200" dist="12700" dir="5400000">
-              <a:srgbClr val="101915">
-                <a:alpha val="6000"/>
-              </a:srgbClr>
-            </a:outerShdw>
-          </a:effectLst>
-        </p:spPr>
-      </p:sp>
-      <p:sp>
-        <p:nvSpPr>
-          <p:cNvPr id="20" name="Shape 18"/>
-          <p:cNvSpPr/>
-          <p:nvPr/>
-        </p:nvSpPr>
-        <p:spPr>
-          <a:xfrm>
-            <a:off x="777240" y="3145536"/>
-            <a:ext cx="457200" cy="457200"/>
-          </a:xfrm>
-          <a:prstGeom prst="ellipse">
-            <a:avLst/>
-          </a:prstGeom>
-          <a:solidFill>
-            <a:srgbClr val="0E7A5F"/>
-          </a:solidFill>
-          <a:ln w="12700">
-            <a:solidFill>
-              <a:srgbClr val="0E7A5F"/>
-            </a:solidFill>
-            <a:prstDash val="solid"/>
-          </a:ln>
-        </p:spPr>
-      </p:sp>
-      <p:sp>
-        <p:nvSpPr>
-          <p:cNvPr id="21" name="Text 19"/>
-          <p:cNvSpPr/>
-          <p:nvPr/>
-        </p:nvSpPr>
-        <p:spPr>
-          <a:xfrm>
-            <a:off x="777240" y="3145536"/>
-            <a:ext cx="457200" cy="457200"/>
-          </a:xfrm>
-          <a:prstGeom prst="rect">
-            <a:avLst/>
-          </a:prstGeom>
-          <a:noFill/>
-          <a:ln/>
-        </p:spPr>
-        <p:txBody>
-          <a:bodyPr wrap="square" lIns="0" tIns="0" rIns="0" bIns="0" rtlCol="0" anchor="ctr"/>
-          <a:lstStyle/>
-          <a:p>
-            <a:pPr algn="ctr" indent="0" marL="0">
-              <a:buNone/>
-            </a:pPr>
-            <a:r>
-              <a:rPr lang="en-US" sz="1600" b="1" dirty="0">
-                <a:solidFill>
-                  <a:srgbClr val="FFFFFF"/>
-                </a:solidFill>
-                <a:latin typeface="Calibri" pitchFamily="34" charset="0"/>
-                <a:ea typeface="Calibri" pitchFamily="34" charset="-122"/>
-                <a:cs typeface="Calibri" pitchFamily="34" charset="-120"/>
-              </a:rPr>
-              <a:t>4</a:t>
-            </a:r>
-            <a:endParaRPr lang="en-US" sz="1600" dirty="0"/>
-          </a:p>
-        </p:txBody>
-      </p:sp>
-      <p:sp>
-        <p:nvSpPr>
-          <p:cNvPr id="22" name="Text 20"/>
-          <p:cNvSpPr/>
-          <p:nvPr/>
-        </p:nvSpPr>
-        <p:spPr>
-          <a:xfrm>
-            <a:off x="1371600" y="3035808"/>
-            <a:ext cx="2560320" cy="292608"/>
-          </a:xfrm>
-          <a:prstGeom prst="rect">
-            <a:avLst/>
-          </a:prstGeom>
-          <a:noFill/>
-          <a:ln/>
-        </p:spPr>
-        <p:txBody>
-          <a:bodyPr wrap="square" lIns="0" tIns="0" rIns="0" bIns="0" rtlCol="0" anchor="ctr"/>
-          <a:lstStyle/>
-          <a:p>
-            <a:pPr indent="0" marL="0">
-              <a:buNone/>
-            </a:pPr>
-            <a:r>
-              <a:rPr lang="en-US" sz="1300" b="1" dirty="0">
-                <a:solidFill>
-                  <a:srgbClr val="101915"/>
-                </a:solidFill>
-                <a:latin typeface="Calibri" pitchFamily="34" charset="0"/>
-                <a:ea typeface="Calibri" pitchFamily="34" charset="-122"/>
-                <a:cs typeface="Calibri" pitchFamily="34" charset="-120"/>
-              </a:rPr>
-              <a:t>Operator scans</a:t>
-            </a:r>
-            <a:endParaRPr lang="en-US" sz="1300" dirty="0"/>
-          </a:p>
-        </p:txBody>
-      </p:sp>
-      <p:sp>
-        <p:nvSpPr>
-          <p:cNvPr id="23" name="Text 21"/>
-          <p:cNvSpPr/>
-          <p:nvPr/>
-        </p:nvSpPr>
-        <p:spPr>
-          <a:xfrm>
-            <a:off x="1371600" y="3328416"/>
-            <a:ext cx="2560320" cy="502920"/>
-          </a:xfrm>
-          <a:prstGeom prst="rect">
-            <a:avLst/>
-          </a:prstGeom>
-          <a:noFill/>
-          <a:ln/>
-        </p:spPr>
-        <p:txBody>
-          <a:bodyPr wrap="square" lIns="0" tIns="0" rIns="0" bIns="0" rtlCol="0" anchor="ctr"/>
-          <a:lstStyle/>
-          <a:p>
-            <a:pPr indent="0" marL="0">
-              <a:buNone/>
-            </a:pPr>
-            <a:r>
-              <a:rPr lang="en-US" sz="1050" dirty="0">
-                <a:solidFill>
-                  <a:srgbClr val="5B6B64"/>
-                </a:solidFill>
-                <a:latin typeface="Calibri" pitchFamily="34" charset="0"/>
-                <a:ea typeface="Calibri" pitchFamily="34" charset="-122"/>
-                <a:cs typeface="Calibri" pitchFamily="34" charset="-120"/>
-              </a:rPr>
-              <a:t>Anna is checked in</a:t>
-            </a:r>
-            <a:endParaRPr lang="en-US" sz="1050" dirty="0"/>
-          </a:p>
-        </p:txBody>
-      </p:sp>
-      <p:sp>
-        <p:nvSpPr>
-          <p:cNvPr id="24" name="Shape 22"/>
-          <p:cNvSpPr/>
-          <p:nvPr/>
-        </p:nvSpPr>
-        <p:spPr>
-          <a:xfrm>
-            <a:off x="4297680" y="2852928"/>
-            <a:ext cx="3520440" cy="1060704"/>
-          </a:xfrm>
-          <a:prstGeom prst="roundRect">
-            <a:avLst>
-              <a:gd name="adj" fmla="val 6897"/>
-            </a:avLst>
-          </a:prstGeom>
-          <a:solidFill>
-            <a:srgbClr val="FFFFFF"/>
-          </a:solidFill>
-          <a:ln w="12700">
-            <a:solidFill>
-              <a:srgbClr val="E3EAE6"/>
-            </a:solidFill>
-            <a:prstDash val="solid"/>
-          </a:ln>
-          <a:effectLst>
-            <a:outerShdw sx="100000" sy="100000" kx="0" ky="0" algn="bl" rotWithShape="0" blurRad="76200" dist="12700" dir="5400000">
-              <a:srgbClr val="101915">
-                <a:alpha val="6000"/>
-              </a:srgbClr>
-            </a:outerShdw>
-          </a:effectLst>
-        </p:spPr>
-      </p:sp>
-      <p:sp>
-        <p:nvSpPr>
-          <p:cNvPr id="25" name="Shape 23"/>
-          <p:cNvSpPr/>
-          <p:nvPr/>
-        </p:nvSpPr>
-        <p:spPr>
-          <a:xfrm>
-            <a:off x="4526280" y="3145536"/>
-            <a:ext cx="457200" cy="457200"/>
-          </a:xfrm>
-          <a:prstGeom prst="ellipse">
-            <a:avLst/>
-          </a:prstGeom>
-          <a:solidFill>
-            <a:srgbClr val="0E7A5F"/>
-          </a:solidFill>
-          <a:ln w="12700">
-            <a:solidFill>
-              <a:srgbClr val="0E7A5F"/>
-            </a:solidFill>
-            <a:prstDash val="solid"/>
-          </a:ln>
-        </p:spPr>
-      </p:sp>
-      <p:sp>
-        <p:nvSpPr>
-          <p:cNvPr id="26" name="Text 24"/>
-          <p:cNvSpPr/>
-          <p:nvPr/>
-        </p:nvSpPr>
-        <p:spPr>
-          <a:xfrm>
-            <a:off x="4526280" y="3145536"/>
-            <a:ext cx="457200" cy="457200"/>
-          </a:xfrm>
-          <a:prstGeom prst="rect">
-            <a:avLst/>
-          </a:prstGeom>
-          <a:noFill/>
-          <a:ln/>
-        </p:spPr>
-        <p:txBody>
-          <a:bodyPr wrap="square" lIns="0" tIns="0" rIns="0" bIns="0" rtlCol="0" anchor="ctr"/>
-          <a:lstStyle/>
-          <a:p>
-            <a:pPr algn="ctr" indent="0" marL="0">
-              <a:buNone/>
-            </a:pPr>
-            <a:r>
-              <a:rPr lang="en-US" sz="1600" b="1" dirty="0">
-                <a:solidFill>
-                  <a:srgbClr val="FFFFFF"/>
-                </a:solidFill>
-                <a:latin typeface="Calibri" pitchFamily="34" charset="0"/>
-                <a:ea typeface="Calibri" pitchFamily="34" charset="-122"/>
-                <a:cs typeface="Calibri" pitchFamily="34" charset="-120"/>
-              </a:rPr>
-              <a:t>5</a:t>
-            </a:r>
-            <a:endParaRPr lang="en-US" sz="1600" dirty="0"/>
-          </a:p>
-        </p:txBody>
-      </p:sp>
-      <p:sp>
-        <p:nvSpPr>
           <p:cNvPr id="27" name="Text 25"/>
-          <p:cNvSpPr/>
-          <p:nvPr/>
-        </p:nvSpPr>
-        <p:spPr>
-          <a:xfrm>
-            <a:off x="5120640" y="3035808"/>
-            <a:ext cx="2560320" cy="292608"/>
-          </a:xfrm>
-          <a:prstGeom prst="rect">
-            <a:avLst/>
-          </a:prstGeom>
-          <a:noFill/>
-          <a:ln/>
-        </p:spPr>
-        <p:txBody>
-          <a:bodyPr wrap="square" lIns="0" tIns="0" rIns="0" bIns="0" rtlCol="0" anchor="ctr"/>
-          <a:lstStyle/>
-          <a:p>
-            <a:pPr indent="0" marL="0">
-              <a:buNone/>
-            </a:pPr>
-            <a:r>
-              <a:rPr lang="en-US" sz="1300" b="1" dirty="0">
-                <a:solidFill>
-                  <a:srgbClr val="101915"/>
-                </a:solidFill>
-                <a:latin typeface="Calibri" pitchFamily="34" charset="0"/>
-                <a:ea typeface="Calibri" pitchFamily="34" charset="-122"/>
-                <a:cs typeface="Calibri" pitchFamily="34" charset="-120"/>
-              </a:rPr>
-              <a:t>Charging starts</a:t>
-            </a:r>
-            <a:endParaRPr lang="en-US" sz="1300" dirty="0"/>
-          </a:p>
-        </p:txBody>
-      </p:sp>
-      <p:sp>
-        <p:nvSpPr>
-          <p:cNvPr id="28" name="Text 26"/>
-          <p:cNvSpPr/>
-          <p:nvPr/>
-        </p:nvSpPr>
-        <p:spPr>
-          <a:xfrm>
-            <a:off x="5120640" y="3328416"/>
-            <a:ext cx="2560320" cy="502920"/>
-          </a:xfrm>
-          <a:prstGeom prst="rect">
-            <a:avLst/>
-          </a:prstGeom>
-          <a:noFill/>
-          <a:ln/>
-        </p:spPr>
-        <p:txBody>
-          <a:bodyPr wrap="square" lIns="0" tIns="0" rIns="0" bIns="0" rtlCol="0" anchor="ctr"/>
-          <a:lstStyle/>
-          <a:p>
-            <a:pPr indent="0" marL="0">
-              <a:buNone/>
-            </a:pPr>
-            <a:r>
-              <a:rPr lang="en-US" sz="1050" dirty="0">
-                <a:solidFill>
-                  <a:srgbClr val="5B6B64"/>
-                </a:solidFill>
-                <a:latin typeface="Calibri" pitchFamily="34" charset="0"/>
-                <a:ea typeface="Calibri" pitchFamily="34" charset="-122"/>
-                <a:cs typeface="Calibri" pitchFamily="34" charset="-120"/>
-              </a:rPr>
-              <a:t>And later ends</a:t>
-            </a:r>
-            <a:endParaRPr lang="en-US" sz="1050" dirty="0"/>
-          </a:p>
-        </p:txBody>
-      </p:sp>
-      <p:sp>
-        <p:nvSpPr>
-          <p:cNvPr id="29" name="Shape 27"/>
-          <p:cNvSpPr/>
-          <p:nvPr/>
-        </p:nvSpPr>
-        <p:spPr>
-          <a:xfrm>
-            <a:off x="8046720" y="2852928"/>
-            <a:ext cx="3520440" cy="1060704"/>
-          </a:xfrm>
-          <a:prstGeom prst="roundRect">
-            <a:avLst>
-              <a:gd name="adj" fmla="val 6897"/>
-            </a:avLst>
-          </a:prstGeom>
-          <a:solidFill>
-            <a:srgbClr val="FFFFFF"/>
-          </a:solidFill>
-          <a:ln w="12700">
-            <a:solidFill>
-              <a:srgbClr val="E3EAE6"/>
-            </a:solidFill>
-            <a:prstDash val="solid"/>
-          </a:ln>
-          <a:effectLst>
-            <a:outerShdw sx="100000" sy="100000" kx="0" ky="0" algn="bl" rotWithShape="0" blurRad="76200" dist="12700" dir="5400000">
-              <a:srgbClr val="101915">
-                <a:alpha val="6000"/>
-              </a:srgbClr>
-            </a:outerShdw>
-          </a:effectLst>
-        </p:spPr>
-      </p:sp>
-      <p:sp>
-        <p:nvSpPr>
-          <p:cNvPr id="30" name="Shape 28"/>
-          <p:cNvSpPr/>
-          <p:nvPr/>
-        </p:nvSpPr>
-        <p:spPr>
-          <a:xfrm>
-            <a:off x="8275320" y="3145536"/>
-            <a:ext cx="457200" cy="457200"/>
-          </a:xfrm>
-          <a:prstGeom prst="ellipse">
-            <a:avLst/>
-          </a:prstGeom>
-          <a:solidFill>
-            <a:srgbClr val="0E7A5F"/>
-          </a:solidFill>
-          <a:ln w="12700">
-            <a:solidFill>
-              <a:srgbClr val="0E7A5F"/>
-            </a:solidFill>
-            <a:prstDash val="solid"/>
-          </a:ln>
-        </p:spPr>
-      </p:sp>
-      <p:sp>
-        <p:nvSpPr>
-          <p:cNvPr id="31" name="Text 29"/>
-          <p:cNvSpPr/>
-          <p:nvPr/>
-        </p:nvSpPr>
-        <p:spPr>
-          <a:xfrm>
-            <a:off x="8275320" y="3145536"/>
-            <a:ext cx="457200" cy="457200"/>
-          </a:xfrm>
-          <a:prstGeom prst="rect">
-            <a:avLst/>
-          </a:prstGeom>
-          <a:noFill/>
-          <a:ln/>
-        </p:spPr>
-        <p:txBody>
-          <a:bodyPr wrap="square" lIns="0" tIns="0" rIns="0" bIns="0" rtlCol="0" anchor="ctr"/>
-          <a:lstStyle/>
-          <a:p>
-            <a:pPr algn="ctr" indent="0" marL="0">
-              <a:buNone/>
-            </a:pPr>
-            <a:r>
-              <a:rPr lang="en-US" sz="1600" b="1" dirty="0">
-                <a:solidFill>
-                  <a:srgbClr val="FFFFFF"/>
-                </a:solidFill>
-                <a:latin typeface="Calibri" pitchFamily="34" charset="0"/>
-                <a:ea typeface="Calibri" pitchFamily="34" charset="-122"/>
-                <a:cs typeface="Calibri" pitchFamily="34" charset="-120"/>
-              </a:rPr>
-              <a:t>6</a:t>
-            </a:r>
-            <a:endParaRPr lang="en-US" sz="1600" dirty="0"/>
-          </a:p>
-        </p:txBody>
-      </p:sp>
-      <p:sp>
-        <p:nvSpPr>
-          <p:cNvPr id="32" name="Text 30"/>
-          <p:cNvSpPr/>
-          <p:nvPr/>
-        </p:nvSpPr>
-        <p:spPr>
-          <a:xfrm>
-            <a:off x="8869680" y="3035808"/>
-            <a:ext cx="2560320" cy="292608"/>
-          </a:xfrm>
-          <a:prstGeom prst="rect">
-            <a:avLst/>
-          </a:prstGeom>
-          <a:noFill/>
-          <a:ln/>
-        </p:spPr>
-        <p:txBody>
-          <a:bodyPr wrap="square" lIns="0" tIns="0" rIns="0" bIns="0" rtlCol="0" anchor="ctr"/>
-          <a:lstStyle/>
-          <a:p>
-            <a:pPr indent="0" marL="0">
-              <a:buNone/>
-            </a:pPr>
-            <a:r>
-              <a:rPr lang="en-US" sz="1300" b="1" dirty="0">
-                <a:solidFill>
-                  <a:srgbClr val="101915"/>
-                </a:solidFill>
-                <a:latin typeface="Calibri" pitchFamily="34" charset="0"/>
-                <a:ea typeface="Calibri" pitchFamily="34" charset="-122"/>
-                <a:cs typeface="Calibri" pitchFamily="34" charset="-120"/>
-              </a:rPr>
-              <a:t>A charger breaks</a:t>
-            </a:r>
-            <a:endParaRPr lang="en-US" sz="1300" dirty="0"/>
-          </a:p>
-        </p:txBody>
-      </p:sp>
-      <p:sp>
-        <p:nvSpPr>
-          <p:cNvPr id="33" name="Text 31"/>
-          <p:cNvSpPr/>
-          <p:nvPr/>
-        </p:nvSpPr>
-        <p:spPr>
-          <a:xfrm>
-            <a:off x="8869680" y="3328416"/>
-            <a:ext cx="2560320" cy="502920"/>
-          </a:xfrm>
-          <a:prstGeom prst="rect">
-            <a:avLst/>
-          </a:prstGeom>
-          <a:noFill/>
-          <a:ln/>
-        </p:spPr>
-        <p:txBody>
-          <a:bodyPr wrap="square" lIns="0" tIns="0" rIns="0" bIns="0" rtlCol="0" anchor="ctr"/>
-          <a:lstStyle/>
-          <a:p>
-            <a:pPr indent="0" marL="0">
-              <a:buNone/>
-            </a:pPr>
-            <a:r>
-              <a:rPr lang="en-US" sz="1050" dirty="0">
-                <a:solidFill>
-                  <a:srgbClr val="5B6B64"/>
-                </a:solidFill>
-                <a:latin typeface="Calibri" pitchFamily="34" charset="0"/>
-                <a:ea typeface="Calibri" pitchFamily="34" charset="-122"/>
-                <a:cs typeface="Calibri" pitchFamily="34" charset="-120"/>
-              </a:rPr>
-              <a:t>Delay spreads to later bookings</a:t>
-            </a:r>
-            <a:endParaRPr lang="en-US" sz="1050" dirty="0"/>
-          </a:p>
-        </p:txBody>
-      </p:sp>
-      <p:sp>
-        <p:nvSpPr>
-          <p:cNvPr id="34" name="Shape 32"/>
-          <p:cNvSpPr/>
-          <p:nvPr/>
-        </p:nvSpPr>
-        <p:spPr>
-          <a:xfrm>
-            <a:off x="548640" y="4059936"/>
-            <a:ext cx="3520440" cy="1060704"/>
-          </a:xfrm>
-          <a:prstGeom prst="roundRect">
-            <a:avLst>
-              <a:gd name="adj" fmla="val 6897"/>
-            </a:avLst>
-          </a:prstGeom>
-          <a:solidFill>
-            <a:srgbClr val="FFFFFF"/>
-          </a:solidFill>
-          <a:ln w="12700">
-            <a:solidFill>
-              <a:srgbClr val="E3EAE6"/>
-            </a:solidFill>
-            <a:prstDash val="solid"/>
-          </a:ln>
-          <a:effectLst>
-            <a:outerShdw sx="100000" sy="100000" kx="0" ky="0" algn="bl" rotWithShape="0" blurRad="76200" dist="12700" dir="5400000">
-              <a:srgbClr val="101915">
-                <a:alpha val="6000"/>
-              </a:srgbClr>
-            </a:outerShdw>
-          </a:effectLst>
-        </p:spPr>
-      </p:sp>
-      <p:sp>
-        <p:nvSpPr>
-          <p:cNvPr id="35" name="Shape 33"/>
-          <p:cNvSpPr/>
-          <p:nvPr/>
-        </p:nvSpPr>
-        <p:spPr>
-          <a:xfrm>
-            <a:off x="777240" y="4352544"/>
-            <a:ext cx="457200" cy="457200"/>
-          </a:xfrm>
-          <a:prstGeom prst="ellipse">
-            <a:avLst/>
-          </a:prstGeom>
-          <a:solidFill>
-            <a:srgbClr val="0E7A5F"/>
-          </a:solidFill>
-          <a:ln w="12700">
-            <a:solidFill>
-              <a:srgbClr val="0E7A5F"/>
-            </a:solidFill>
-            <a:prstDash val="solid"/>
-          </a:ln>
-        </p:spPr>
-      </p:sp>
-      <p:sp>
-        <p:nvSpPr>
-          <p:cNvPr id="36" name="Text 34"/>
-          <p:cNvSpPr/>
-          <p:nvPr/>
-        </p:nvSpPr>
-        <p:spPr>
-          <a:xfrm>
-            <a:off x="777240" y="4352544"/>
-            <a:ext cx="457200" cy="457200"/>
-          </a:xfrm>
-          <a:prstGeom prst="rect">
-            <a:avLst/>
-          </a:prstGeom>
-          <a:noFill/>
-          <a:ln/>
-        </p:spPr>
-        <p:txBody>
-          <a:bodyPr wrap="square" lIns="0" tIns="0" rIns="0" bIns="0" rtlCol="0" anchor="ctr"/>
-          <a:lstStyle/>
-          <a:p>
-            <a:pPr algn="ctr" indent="0" marL="0">
-              <a:buNone/>
-            </a:pPr>
-            <a:r>
-              <a:rPr lang="en-US" sz="1600" b="1" dirty="0">
-                <a:solidFill>
-                  <a:srgbClr val="FFFFFF"/>
-                </a:solidFill>
-                <a:latin typeface="Calibri" pitchFamily="34" charset="0"/>
-                <a:ea typeface="Calibri" pitchFamily="34" charset="-122"/>
-                <a:cs typeface="Calibri" pitchFamily="34" charset="-120"/>
-              </a:rPr>
-              <a:t>7</a:t>
-            </a:r>
-            <a:endParaRPr lang="en-US" sz="1600" dirty="0"/>
-          </a:p>
-        </p:txBody>
-      </p:sp>
-      <p:sp>
-        <p:nvSpPr>
-          <p:cNvPr id="37" name="Text 35"/>
-          <p:cNvSpPr/>
-          <p:nvPr/>
-        </p:nvSpPr>
-        <p:spPr>
-          <a:xfrm>
-            <a:off x="1371600" y="4242816"/>
-            <a:ext cx="2560320" cy="292608"/>
-          </a:xfrm>
-          <a:prstGeom prst="rect">
-            <a:avLst/>
-          </a:prstGeom>
-          <a:noFill/>
-          <a:ln/>
-        </p:spPr>
-        <p:txBody>
-          <a:bodyPr wrap="square" lIns="0" tIns="0" rIns="0" bIns="0" rtlCol="0" anchor="ctr"/>
-          <a:lstStyle/>
-          <a:p>
-            <a:pPr indent="0" marL="0">
-              <a:buNone/>
-            </a:pPr>
-            <a:r>
-              <a:rPr lang="en-US" sz="1300" b="1" dirty="0">
-                <a:solidFill>
-                  <a:srgbClr val="101915"/>
-                </a:solidFill>
-                <a:latin typeface="Calibri" pitchFamily="34" charset="0"/>
-                <a:ea typeface="Calibri" pitchFamily="34" charset="-122"/>
-                <a:cs typeface="Calibri" pitchFamily="34" charset="-120"/>
-              </a:rPr>
-              <a:t>Anna asks for more time</a:t>
-            </a:r>
-            <a:endParaRPr lang="en-US" sz="1300" dirty="0"/>
-          </a:p>
-        </p:txBody>
-      </p:sp>
-      <p:sp>
-        <p:nvSpPr>
-          <p:cNvPr id="38" name="Text 36"/>
-          <p:cNvSpPr/>
-          <p:nvPr/>
-        </p:nvSpPr>
-        <p:spPr>
-          <a:xfrm>
-            <a:off x="1371600" y="4535424"/>
-            <a:ext cx="2560320" cy="502920"/>
-          </a:xfrm>
-          <a:prstGeom prst="rect">
-            <a:avLst/>
-          </a:prstGeom>
-          <a:noFill/>
-          <a:ln/>
-        </p:spPr>
-        <p:txBody>
-          <a:bodyPr wrap="square" lIns="0" tIns="0" rIns="0" bIns="0" rtlCol="0" anchor="ctr"/>
-          <a:lstStyle/>
-          <a:p>
-            <a:pPr indent="0" marL="0">
-              <a:buNone/>
-            </a:pPr>
-            <a:r>
-              <a:rPr lang="en-US" sz="1050" dirty="0">
-                <a:solidFill>
-                  <a:srgbClr val="5B6B64"/>
-                </a:solidFill>
-                <a:latin typeface="Calibri" pitchFamily="34" charset="0"/>
-                <a:ea typeface="Calibri" pitchFamily="34" charset="-122"/>
-                <a:cs typeface="Calibri" pitchFamily="34" charset="-120"/>
-              </a:rPr>
-              <a:t>Granted only if it truly fits</a:t>
-            </a:r>
-            <a:endParaRPr lang="en-US" sz="1050" dirty="0"/>
-          </a:p>
-        </p:txBody>
-      </p:sp>
-      <p:sp>
-        <p:nvSpPr>
-          <p:cNvPr id="39" name="Shape 37"/>
-          <p:cNvSpPr/>
-          <p:nvPr/>
-        </p:nvSpPr>
-        <p:spPr>
-          <a:xfrm>
-            <a:off x="4297680" y="4059936"/>
-            <a:ext cx="3520440" cy="1060704"/>
-          </a:xfrm>
-          <a:prstGeom prst="roundRect">
-            <a:avLst>
-              <a:gd name="adj" fmla="val 6897"/>
-            </a:avLst>
-          </a:prstGeom>
-          <a:solidFill>
-            <a:srgbClr val="FFFFFF"/>
-          </a:solidFill>
-          <a:ln w="12700">
-            <a:solidFill>
-              <a:srgbClr val="E3EAE6"/>
-            </a:solidFill>
-            <a:prstDash val="solid"/>
-          </a:ln>
-          <a:effectLst>
-            <a:outerShdw sx="100000" sy="100000" kx="0" ky="0" algn="bl" rotWithShape="0" blurRad="76200" dist="12700" dir="5400000">
-              <a:srgbClr val="101915">
-                <a:alpha val="6000"/>
-              </a:srgbClr>
-            </a:outerShdw>
-          </a:effectLst>
-        </p:spPr>
-      </p:sp>
-      <p:sp>
-        <p:nvSpPr>
-          <p:cNvPr id="40" name="Shape 38"/>
-          <p:cNvSpPr/>
-          <p:nvPr/>
-        </p:nvSpPr>
-        <p:spPr>
-          <a:xfrm>
-            <a:off x="4526280" y="4352544"/>
-            <a:ext cx="457200" cy="457200"/>
-          </a:xfrm>
-          <a:prstGeom prst="ellipse">
-            <a:avLst/>
-          </a:prstGeom>
-          <a:solidFill>
-            <a:srgbClr val="0E7A5F"/>
-          </a:solidFill>
-          <a:ln w="12700">
-            <a:solidFill>
-              <a:srgbClr val="0E7A5F"/>
-            </a:solidFill>
-            <a:prstDash val="solid"/>
-          </a:ln>
-        </p:spPr>
-      </p:sp>
-      <p:sp>
-        <p:nvSpPr>
-          <p:cNvPr id="41" name="Text 39"/>
-          <p:cNvSpPr/>
-          <p:nvPr/>
-        </p:nvSpPr>
-        <p:spPr>
-          <a:xfrm>
-            <a:off x="4526280" y="4352544"/>
-            <a:ext cx="457200" cy="457200"/>
-          </a:xfrm>
-          <a:prstGeom prst="rect">
-            <a:avLst/>
-          </a:prstGeom>
-          <a:noFill/>
-          <a:ln/>
-        </p:spPr>
-        <p:txBody>
-          <a:bodyPr wrap="square" lIns="0" tIns="0" rIns="0" bIns="0" rtlCol="0" anchor="ctr"/>
-          <a:lstStyle/>
-          <a:p>
-            <a:pPr algn="ctr" indent="0" marL="0">
-              <a:buNone/>
-            </a:pPr>
-            <a:r>
-              <a:rPr lang="en-US" sz="1600" b="1" dirty="0">
-                <a:solidFill>
-                  <a:srgbClr val="FFFFFF"/>
-                </a:solidFill>
-                <a:latin typeface="Calibri" pitchFamily="34" charset="0"/>
-                <a:ea typeface="Calibri" pitchFamily="34" charset="-122"/>
-                <a:cs typeface="Calibri" pitchFamily="34" charset="-120"/>
-              </a:rPr>
-              <a:t>8</a:t>
-            </a:r>
-            <a:endParaRPr lang="en-US" sz="1600" dirty="0"/>
-          </a:p>
-        </p:txBody>
-      </p:sp>
-      <p:sp>
-        <p:nvSpPr>
-          <p:cNvPr id="42" name="Text 40"/>
-          <p:cNvSpPr/>
-          <p:nvPr/>
-        </p:nvSpPr>
-        <p:spPr>
-          <a:xfrm>
-            <a:off x="5120640" y="4242816"/>
-            <a:ext cx="2560320" cy="292608"/>
-          </a:xfrm>
-          <a:prstGeom prst="rect">
-            <a:avLst/>
-          </a:prstGeom>
-          <a:noFill/>
-          <a:ln/>
-        </p:spPr>
-        <p:txBody>
-          <a:bodyPr wrap="square" lIns="0" tIns="0" rIns="0" bIns="0" rtlCol="0" anchor="ctr"/>
-          <a:lstStyle/>
-          <a:p>
-            <a:pPr indent="0" marL="0">
-              <a:buNone/>
-            </a:pPr>
-            <a:r>
-              <a:rPr lang="en-US" sz="1300" b="1" dirty="0">
-                <a:solidFill>
-                  <a:srgbClr val="101915"/>
-                </a:solidFill>
-                <a:latin typeface="Calibri" pitchFamily="34" charset="0"/>
-                <a:ea typeface="Calibri" pitchFamily="34" charset="-122"/>
-                <a:cs typeface="Calibri" pitchFamily="34" charset="-120"/>
-              </a:rPr>
-              <a:t>The system re-plans</a:t>
-            </a:r>
-            <a:endParaRPr lang="en-US" sz="1300" dirty="0"/>
-          </a:p>
-        </p:txBody>
-      </p:sp>
-      <p:sp>
-        <p:nvSpPr>
-          <p:cNvPr id="43" name="Text 41"/>
-          <p:cNvSpPr/>
-          <p:nvPr/>
-        </p:nvSpPr>
-        <p:spPr>
-          <a:xfrm>
-            <a:off x="5120640" y="4535424"/>
-            <a:ext cx="2560320" cy="502920"/>
-          </a:xfrm>
-          <a:prstGeom prst="rect">
-            <a:avLst/>
-          </a:prstGeom>
-          <a:noFill/>
-          <a:ln/>
-        </p:spPr>
-        <p:txBody>
-          <a:bodyPr wrap="square" lIns="0" tIns="0" rIns="0" bIns="0" rtlCol="0" anchor="ctr"/>
-          <a:lstStyle/>
-          <a:p>
-            <a:pPr indent="0" marL="0">
-              <a:buNone/>
-            </a:pPr>
-            <a:r>
-              <a:rPr lang="en-US" sz="1050" dirty="0">
-                <a:solidFill>
-                  <a:srgbClr val="5B6B64"/>
-                </a:solidFill>
-                <a:latin typeface="Calibri" pitchFamily="34" charset="0"/>
-                <a:ea typeface="Calibri" pitchFamily="34" charset="-122"/>
-                <a:cs typeface="Calibri" pitchFamily="34" charset="-120"/>
-              </a:rPr>
-              <a:t>Freed time is offered to someone waiting</a:t>
-            </a:r>
-            <a:endParaRPr lang="en-US" sz="1050" dirty="0"/>
-          </a:p>
-        </p:txBody>
-      </p:sp>
-      <p:sp>
-        <p:nvSpPr>
-          <p:cNvPr id="44" name="Shape 42"/>
-          <p:cNvSpPr/>
-          <p:nvPr/>
-        </p:nvSpPr>
-        <p:spPr>
-          <a:xfrm>
-            <a:off x="8046720" y="4059936"/>
-            <a:ext cx="3520440" cy="1060704"/>
-          </a:xfrm>
-          <a:prstGeom prst="roundRect">
-            <a:avLst>
-              <a:gd name="adj" fmla="val 6897"/>
-            </a:avLst>
-          </a:prstGeom>
-          <a:solidFill>
-            <a:srgbClr val="FFFFFF"/>
-          </a:solidFill>
-          <a:ln w="12700">
-            <a:solidFill>
-              <a:srgbClr val="E3EAE6"/>
-            </a:solidFill>
-            <a:prstDash val="solid"/>
-          </a:ln>
-          <a:effectLst>
-            <a:outerShdw sx="100000" sy="100000" kx="0" ky="0" algn="bl" rotWithShape="0" blurRad="76200" dist="12700" dir="5400000">
-              <a:srgbClr val="101915">
-                <a:alpha val="6000"/>
-              </a:srgbClr>
-            </a:outerShdw>
-          </a:effectLst>
-        </p:spPr>
-      </p:sp>
-      <p:sp>
-        <p:nvSpPr>
-          <p:cNvPr id="45" name="Shape 43"/>
-          <p:cNvSpPr/>
-          <p:nvPr/>
-        </p:nvSpPr>
-        <p:spPr>
-          <a:xfrm>
-            <a:off x="8275320" y="4352544"/>
-            <a:ext cx="457200" cy="457200"/>
-          </a:xfrm>
-          <a:prstGeom prst="ellipse">
-            <a:avLst/>
-          </a:prstGeom>
-          <a:solidFill>
-            <a:srgbClr val="0E7A5F"/>
-          </a:solidFill>
-          <a:ln w="12700">
-            <a:solidFill>
-              <a:srgbClr val="0E7A5F"/>
-            </a:solidFill>
-            <a:prstDash val="solid"/>
-          </a:ln>
-        </p:spPr>
-      </p:sp>
-      <p:sp>
-        <p:nvSpPr>
-          <p:cNvPr id="46" name="Text 44"/>
-          <p:cNvSpPr/>
-          <p:nvPr/>
-        </p:nvSpPr>
-        <p:spPr>
-          <a:xfrm>
-            <a:off x="8275320" y="4352544"/>
-            <a:ext cx="457200" cy="457200"/>
-          </a:xfrm>
-          <a:prstGeom prst="rect">
-            <a:avLst/>
-          </a:prstGeom>
-          <a:noFill/>
-          <a:ln/>
-        </p:spPr>
-        <p:txBody>
-          <a:bodyPr wrap="square" lIns="0" tIns="0" rIns="0" bIns="0" rtlCol="0" anchor="ctr"/>
-          <a:lstStyle/>
-          <a:p>
-            <a:pPr algn="ctr" indent="0" marL="0">
-              <a:buNone/>
-            </a:pPr>
-            <a:r>
-              <a:rPr lang="en-US" sz="1600" b="1" dirty="0">
-                <a:solidFill>
-                  <a:srgbClr val="FFFFFF"/>
-                </a:solidFill>
-                <a:latin typeface="Calibri" pitchFamily="34" charset="0"/>
-                <a:ea typeface="Calibri" pitchFamily="34" charset="-122"/>
-                <a:cs typeface="Calibri" pitchFamily="34" charset="-120"/>
-              </a:rPr>
-              <a:t>9</a:t>
-            </a:r>
-            <a:endParaRPr lang="en-US" sz="1600" dirty="0"/>
-          </a:p>
-        </p:txBody>
-      </p:sp>
-      <p:sp>
-        <p:nvSpPr>
-          <p:cNvPr id="47" name="Text 45"/>
-          <p:cNvSpPr/>
-          <p:nvPr/>
-        </p:nvSpPr>
-        <p:spPr>
-          <a:xfrm>
-            <a:off x="8869680" y="4242816"/>
-            <a:ext cx="2560320" cy="292608"/>
-          </a:xfrm>
-          <a:prstGeom prst="rect">
-            <a:avLst/>
-          </a:prstGeom>
-          <a:noFill/>
-          <a:ln/>
-        </p:spPr>
-        <p:txBody>
-          <a:bodyPr wrap="square" lIns="0" tIns="0" rIns="0" bIns="0" rtlCol="0" anchor="ctr"/>
-          <a:lstStyle/>
-          <a:p>
-            <a:pPr indent="0" marL="0">
-              <a:buNone/>
-            </a:pPr>
-            <a:r>
-              <a:rPr lang="en-US" sz="1300" b="1" dirty="0">
-                <a:solidFill>
-                  <a:srgbClr val="101915"/>
-                </a:solidFill>
-                <a:latin typeface="Calibri" pitchFamily="34" charset="0"/>
-                <a:ea typeface="Calibri" pitchFamily="34" charset="-122"/>
-                <a:cs typeface="Calibri" pitchFamily="34" charset="-120"/>
-              </a:rPr>
-              <a:t>Dashboards update</a:t>
-            </a:r>
-            <a:endParaRPr lang="en-US" sz="1300" dirty="0"/>
-          </a:p>
-        </p:txBody>
-      </p:sp>
-      <p:sp>
-        <p:nvSpPr>
-          <p:cNvPr id="48" name="Text 46"/>
-          <p:cNvSpPr/>
-          <p:nvPr/>
-        </p:nvSpPr>
-        <p:spPr>
-          <a:xfrm>
-            <a:off x="8869680" y="4535424"/>
-            <a:ext cx="2560320" cy="502920"/>
-          </a:xfrm>
-          <a:prstGeom prst="rect">
-            <a:avLst/>
-          </a:prstGeom>
-          <a:noFill/>
-          <a:ln/>
-        </p:spPr>
-        <p:txBody>
-          <a:bodyPr wrap="square" lIns="0" tIns="0" rIns="0" bIns="0" rtlCol="0" anchor="ctr"/>
-          <a:lstStyle/>
-          <a:p>
-            <a:pPr indent="0" marL="0">
-              <a:buNone/>
-            </a:pPr>
-            <a:r>
-              <a:rPr lang="en-US" sz="1050" dirty="0">
-                <a:solidFill>
-                  <a:srgbClr val="5B6B64"/>
-                </a:solidFill>
-                <a:latin typeface="Calibri" pitchFamily="34" charset="0"/>
-                <a:ea typeface="Calibri" pitchFamily="34" charset="-122"/>
-                <a:cs typeface="Calibri" pitchFamily="34" charset="-120"/>
-              </a:rPr>
-              <a:t>Every number moves</a:t>
-            </a:r>
-            <a:endParaRPr lang="en-US" sz="1050" dirty="0"/>
-          </a:p>
-        </p:txBody>
-      </p:sp>
-      <p:sp>
-        <p:nvSpPr>
-          <p:cNvPr id="49" name="Text 47"/>
-          <p:cNvSpPr/>
-          <p:nvPr/>
-        </p:nvSpPr>
-        <p:spPr>
-          <a:xfrm>
-            <a:off x="548640" y="5440680"/>
-            <a:ext cx="11064240" cy="457200"/>
-          </a:xfrm>
-          <a:prstGeom prst="rect">
-            <a:avLst/>
-          </a:prstGeom>
-          <a:noFill/>
-          <a:ln/>
-        </p:spPr>
-        <p:txBody>
-          <a:bodyPr wrap="square" lIns="0" tIns="0" rIns="0" bIns="0" rtlCol="0" anchor="ctr"/>
-          <a:lstStyle/>
-          <a:p>
-            <a:pPr indent="0" marL="0">
-              <a:buNone/>
-            </a:pPr>
-            <a:r>
-              <a:rPr lang="en-US" sz="1300" i="1" dirty="0">
-                <a:solidFill>
-                  <a:srgbClr val="0E7A5F"/>
-                </a:solidFill>
-                <a:latin typeface="Calibri" pitchFamily="34" charset="0"/>
-                <a:ea typeface="Calibri" pitchFamily="34" charset="-122"/>
-                <a:cs typeface="Calibri" pitchFamily="34" charset="-120"/>
-              </a:rPr>
-              <a:t>Three recorded scenarios: a contested afternoon and how the optimizer resolves it · a charger failure and the delay it causes · time given back when a driver leaves early.</a:t>
-            </a:r>
-            <a:endParaRPr lang="en-US" sz="1300" dirty="0"/>
-          </a:p>
-        </p:txBody>
-      </p:sp>
-      <p:sp>
-        <p:nvSpPr>
-          <p:cNvPr id="50" name="Text 48"/>
           <p:cNvSpPr/>
           <p:nvPr/>
         </p:nvSpPr>
